--- a/slide/D2-V1_presentation.pptx
+++ b/slide/D2-V1_presentation.pptx
@@ -3402,7 +3402,7 @@
             <a:avLst/>
           </a:prstGeom>
           <a:solidFill>
-            <a:srgbClr val="16293A"/>
+            <a:srgbClr val="121212"/>
           </a:solidFill>
           <a:ln>
             <a:noFill/>
@@ -3704,7 +3704,7 @@
             <a:avLst/>
           </a:prstGeom>
           <a:solidFill>
-            <a:srgbClr val="16293A"/>
+            <a:srgbClr val="121212"/>
           </a:solidFill>
           <a:ln>
             <a:noFill/>
@@ -6423,7 +6423,7 @@
                 </a:solidFill>
                 <a:latin typeface="Arial"/>
               </a:rPr>
-              <a:t>What I learned</a:t>
+              <a:t>Reflection</a:t>
             </a:r>
           </a:p>
         </p:txBody>
@@ -6436,8 +6436,8 @@
         </p:nvSpPr>
         <p:spPr>
           <a:xfrm>
-            <a:off x="566928" y="1463040"/>
-            <a:ext cx="11064240" cy="4754880"/>
+            <a:off x="566928" y="1371600"/>
+            <a:ext cx="11064240" cy="4846320"/>
           </a:xfrm>
           <a:prstGeom prst="rect">
             <a:avLst/>
@@ -6452,83 +6452,166 @@
           <a:p>
             <a:pPr algn="l">
               <a:spcAft>
-                <a:spcPts val="1400"/>
-              </a:spcAft>
-            </a:pPr>
-            <a:r>
-              <a:rPr sz="1900" b="0" i="0">
-                <a:solidFill>
-                  <a:srgbClr val="121212"/>
-                </a:solidFill>
-                <a:latin typeface="Arial"/>
-              </a:rPr>
-              <a:t>-  State predicates are causal milestones, not physics. Anything left implicit is something the planner can exploit.</a:t>
-            </a:r>
-          </a:p>
-          <a:p>
-            <a:pPr algn="l">
-              <a:spcAft>
-                <a:spcPts val="1400"/>
-              </a:spcAft>
-            </a:pPr>
-            <a:r>
-              <a:rPr sz="1900" b="0" i="0">
-                <a:solidFill>
-                  <a:srgbClr val="121212"/>
-                </a:solidFill>
-                <a:latin typeface="Arial"/>
-              </a:rPr>
-              <a:t>-  Correct ordering needs no script: preconditions alone give the 3-step and 9-step plans.</a:t>
-            </a:r>
-          </a:p>
-          <a:p>
-            <a:pPr algn="l">
-              <a:spcAft>
-                <a:spcPts val="1400"/>
-              </a:spcAft>
-            </a:pPr>
-            <a:r>
-              <a:rPr sz="1900" b="0" i="0">
-                <a:solidFill>
-                  <a:srgbClr val="121212"/>
-                </a:solidFill>
-                <a:latin typeface="Arial"/>
-              </a:rPr>
-              <a:t>-  PDDL+ changes the game: processes run without the planner, events fire at thresholds, and waiting is no longer free.</a:t>
-            </a:r>
-          </a:p>
-          <a:p>
-            <a:pPr algn="l">
-              <a:spcAft>
-                <a:spcPts val="1400"/>
-              </a:spcAft>
-            </a:pPr>
-            <a:r>
-              <a:rPr sz="1900" b="0" i="0">
-                <a:solidFill>
-                  <a:srgbClr val="121212"/>
-                </a:solidFill>
-                <a:latin typeface="Arial"/>
-              </a:rPr>
-              <a:t>-  One duration value flips an instance from solvable to provably unsolvable. That is timing affecting plan validity.</a:t>
-            </a:r>
-          </a:p>
-          <a:p>
-            <a:pPr algn="l">
-              <a:spcAft>
-                <a:spcPts val="1400"/>
-              </a:spcAft>
-            </a:pPr>
-            <a:r>
-              <a:rPr sz="1900" b="0" i="0">
-                <a:solidFill>
-                  <a:srgbClr val="121212"/>
-                </a:solidFill>
-                <a:latin typeface="Arial"/>
-              </a:rPr>
-              <a:t>-  Practical notes: ENHSP has no durative actions, reserves the name at, and discretises the dynamics with a 1-second step.</a:t>
-            </a:r>
-          </a:p>
+                <a:spcPts val="400"/>
+              </a:spcAft>
+            </a:pPr>
+            <a:r>
+              <a:rPr sz="1700" b="1" i="0">
+                <a:solidFill>
+                  <a:srgbClr val="121212"/>
+                </a:solidFill>
+                <a:latin typeface="Arial"/>
+              </a:rPr>
+              <a:t>Main challenges</a:t>
+            </a:r>
+          </a:p>
+          <a:p>
+            <a:pPr algn="l">
+              <a:spcAft>
+                <a:spcPts val="400"/>
+              </a:spcAft>
+            </a:pPr>
+            <a:r>
+              <a:rPr sz="1400" b="0" i="0">
+                <a:solidFill>
+                  <a:srgbClr val="555555"/>
+                </a:solidFill>
+                <a:latin typeface="Arial"/>
+              </a:rPr>
+              <a:t>-  ENHSP has no durative actions, so brewing and delivery had to be rebuilt as a start action plus a clock process plus a completion event</a:t>
+            </a:r>
+          </a:p>
+          <a:p>
+            <a:pPr algn="l">
+              <a:spcAft>
+                <a:spcPts val="400"/>
+              </a:spcAft>
+            </a:pPr>
+            <a:r>
+              <a:rPr sz="1400" b="0" i="0">
+                <a:solidFill>
+                  <a:srgbClr val="555555"/>
+                </a:solidFill>
+                <a:latin typeface="Arial"/>
+              </a:rPr>
+              <a:t>-  the planner found a loophole (re-brewing spoiled coffee mid-delivery); closing it needed extra preconditions</a:t>
+            </a:r>
+          </a:p>
+          <a:p>
+            <a:pPr algn="l">
+              <a:spcAft>
+                <a:spcPts val="400"/>
+              </a:spcAft>
+            </a:pPr>
+            <a:r>
+              <a:rPr sz="1400" b="0" i="0">
+                <a:solidFill>
+                  <a:srgbClr val="555555"/>
+                </a:solidFill>
+                <a:latin typeface="Arial"/>
+              </a:rPr>
+              <a:t>-  ENHSP quirks: the name at is reserved, and it discretises time with a 1-second step</a:t>
+            </a:r>
+          </a:p>
+          <a:p/>
+          <a:p>
+            <a:pPr algn="l">
+              <a:spcAft>
+                <a:spcPts val="400"/>
+              </a:spcAft>
+            </a:pPr>
+            <a:r>
+              <a:rPr sz="1700" b="1" i="0">
+                <a:solidFill>
+                  <a:srgbClr val="121212"/>
+                </a:solidFill>
+                <a:latin typeface="Arial"/>
+              </a:rPr>
+              <a:t>What I would do differently</a:t>
+            </a:r>
+          </a:p>
+          <a:p>
+            <a:pPr algn="l">
+              <a:spcAft>
+                <a:spcPts val="400"/>
+              </a:spcAft>
+            </a:pPr>
+            <a:r>
+              <a:rPr sz="1400" b="0" i="0">
+                <a:solidFill>
+                  <a:srgbClr val="555555"/>
+                </a:solidFill>
+                <a:latin typeface="Arial"/>
+              </a:rPr>
+              <a:t>-  use exponential cooling instead of a constant rate, closer to real physics</a:t>
+            </a:r>
+          </a:p>
+          <a:p>
+            <a:pPr algn="l">
+              <a:spcAft>
+                <a:spcPts val="400"/>
+              </a:spcAft>
+            </a:pPr>
+            <a:r>
+              <a:rPr sz="1400" b="0" i="0">
+                <a:solidFill>
+                  <a:srgbClr val="555555"/>
+                </a:solidFill>
+                <a:latin typeface="Arial"/>
+              </a:rPr>
+              <a:t>-  model water and powder as numeric resources and add a clean-up action for spoiled coffee</a:t>
+            </a:r>
+          </a:p>
+          <a:p/>
+          <a:p>
+            <a:pPr algn="l">
+              <a:spcAft>
+                <a:spcPts val="400"/>
+              </a:spcAft>
+            </a:pPr>
+            <a:r>
+              <a:rPr sz="1700" b="1" i="0">
+                <a:solidFill>
+                  <a:srgbClr val="121212"/>
+                </a:solidFill>
+                <a:latin typeface="Arial"/>
+              </a:rPr>
+              <a:t>Limitations of the model</a:t>
+            </a:r>
+          </a:p>
+          <a:p>
+            <a:pPr algn="l">
+              <a:spcAft>
+                <a:spcPts val="400"/>
+              </a:spcAft>
+            </a:pPr>
+            <a:r>
+              <a:rPr sz="1400" b="0" i="0">
+                <a:solidFill>
+                  <a:srgbClr val="555555"/>
+                </a:solidFill>
+                <a:latin typeface="Arial"/>
+              </a:rPr>
+              <a:t>-  states are causal milestones, not quantities: no partial fills and no real temperature curve</a:t>
+            </a:r>
+          </a:p>
+          <a:p>
+            <a:pPr algn="l">
+              <a:spcAft>
+                <a:spcPts val="400"/>
+              </a:spcAft>
+            </a:pPr>
+            <a:r>
+              <a:rPr sz="1400" b="0" i="0">
+                <a:solidFill>
+                  <a:srgbClr val="555555"/>
+                </a:solidFill>
+                <a:latin typeface="Arial"/>
+              </a:rPr>
+              <a:t>-  no geometry, grasp feasibility or sensing (the task-motion gap); the symbolic plan assumes the physical actions just work</a:t>
+            </a:r>
+          </a:p>
+          <a:p/>
         </p:txBody>
       </p:sp>
       <p:sp>
@@ -6539,8 +6622,8 @@
         </p:nvSpPr>
         <p:spPr>
           <a:xfrm>
-            <a:off x="566928" y="5943600"/>
-            <a:ext cx="11064240" cy="457200"/>
+            <a:off x="566928" y="6437376"/>
+            <a:ext cx="8229600" cy="292608"/>
           </a:xfrm>
           <a:prstGeom prst="rect">
             <a:avLst/>
@@ -6559,13 +6642,13 @@
               </a:spcAft>
             </a:pPr>
             <a:r>
-              <a:rPr sz="1200" b="0" i="0">
+              <a:rPr sz="950" b="0" i="0">
                 <a:solidFill>
                   <a:srgbClr val="555555"/>
                 </a:solidFill>
                 <a:latin typeface="Arial"/>
               </a:rPr>
-              <a:t>Repository: github.com/albertrichard080/D2-V1-Domestic-Service-Robot-Basic-Coffee-Preparation</a:t>
+              <a:t>Richard Albert King Mechoda</a:t>
             </a:r>
           </a:p>
         </p:txBody>
@@ -6573,45 +6656,6 @@
       <p:sp>
         <p:nvSpPr>
           <p:cNvPr id="6" name="TextBox 5"/>
-          <p:cNvSpPr txBox="1"/>
-          <p:nvPr/>
-        </p:nvSpPr>
-        <p:spPr>
-          <a:xfrm>
-            <a:off x="566928" y="6437376"/>
-            <a:ext cx="8229600" cy="292608"/>
-          </a:xfrm>
-          <a:prstGeom prst="rect">
-            <a:avLst/>
-          </a:prstGeom>
-          <a:noFill/>
-        </p:spPr>
-        <p:txBody>
-          <a:bodyPr wrap="square" anchor="t" lIns="0" rIns="0" tIns="0" bIns="0">
-            <a:spAutoFit/>
-          </a:bodyPr>
-          <a:lstStyle/>
-          <a:p>
-            <a:pPr algn="l">
-              <a:spcAft>
-                <a:spcPts val="0"/>
-              </a:spcAft>
-            </a:pPr>
-            <a:r>
-              <a:rPr sz="950" b="0" i="0">
-                <a:solidFill>
-                  <a:srgbClr val="555555"/>
-                </a:solidFill>
-                <a:latin typeface="Arial"/>
-              </a:rPr>
-              <a:t>Richard Albert King Mechoda</a:t>
-            </a:r>
-          </a:p>
-        </p:txBody>
-      </p:sp>
-      <p:sp>
-        <p:nvSpPr>
-          <p:cNvPr id="7" name="TextBox 6"/>
           <p:cNvSpPr txBox="1"/>
           <p:nvPr/>
         </p:nvSpPr>
